--- a/presentation/VoiceRiders-4min.pptx
+++ b/presentation/VoiceRiders-4min.pptx
@@ -6090,7 +6090,7 @@
                 </a:solidFill>
                 <a:latin typeface="Segoe UI"/>
               </a:rPr>
-              <a:t>Speaker 3 — existing options and where the gap is</a:t>
+              <a:t>Speaker 3 — mainstream assistants, motorbike OEM systems, and where the gap is</a:t>
             </a:r>
           </a:p>
         </p:txBody>
@@ -6218,8 +6218,8 @@
           <p:nvPr/>
         </p:nvGraphicFramePr>
         <p:xfrm>
-          <a:off x="548640" y="1417320"/>
-          <a:ext cx="11064240" cy="2834640"/>
+          <a:off x="548640" y="1298448"/>
+          <a:ext cx="11064240" cy="3383280"/>
         </p:xfrm>
         <a:graphic>
           <a:graphicData uri="http://schemas.openxmlformats.org/drawingml/2006/table">
@@ -6228,14 +6228,14 @@
                 <a:tableStyleId>{5C22544A-7EE6-4342-B048-85BDC9FD1C3A}</a:tableStyleId>
               </a:tblPr>
               <a:tblGrid>
-                <a:gridCol w="3200400"/>
+                <a:gridCol w="2743200"/>
+                <a:gridCol w="2286000"/>
+                <a:gridCol w="1188720"/>
+                <a:gridCol w="1280160"/>
                 <a:gridCol w="1371600"/>
-                <a:gridCol w="1691640"/>
-                <a:gridCol w="1691640"/>
-                <a:gridCol w="1691640"/>
-                <a:gridCol w="1417320"/>
+                <a:gridCol w="2194560"/>
               </a:tblGrid>
-              <a:tr h="472440">
+              <a:tr h="375920">
                 <a:tc>
                   <a:txBody>
                     <a:bodyPr/>
@@ -6243,7 +6243,7 @@
                     <a:p>
                       <a:pPr algn="l"/>
                       <a:r>
-                        <a:rPr sz="1200" b="1">
+                        <a:rPr sz="1100" b="1">
                           <a:solidFill>
                             <a:srgbClr val="93A1B8"/>
                           </a:solidFill>
@@ -6264,9 +6264,32 @@
                     <a:bodyPr/>
                     <a:lstStyle/>
                     <a:p>
+                      <a:pPr algn="l"/>
+                      <a:r>
+                        <a:rPr sz="1100" b="1">
+                          <a:solidFill>
+                            <a:srgbClr val="93A1B8"/>
+                          </a:solidFill>
+                          <a:latin typeface="Segoe UI"/>
+                        </a:rPr>
+                        <a:t>Hardware needed</a:t>
+                      </a:r>
+                    </a:p>
+                  </a:txBody>
+                  <a:tcPr anchor="ctr">
+                    <a:solidFill>
+                      <a:srgbClr val="1B2740"/>
+                    </a:solidFill>
+                  </a:tcPr>
+                </a:tc>
+                <a:tc>
+                  <a:txBody>
+                    <a:bodyPr/>
+                    <a:lstStyle/>
+                    <a:p>
                       <a:pPr algn="ctr"/>
                       <a:r>
-                        <a:rPr sz="1200" b="1">
+                        <a:rPr sz="1100" b="1">
                           <a:solidFill>
                             <a:srgbClr val="93A1B8"/>
                           </a:solidFill>
@@ -6289,13 +6312,13 @@
                     <a:p>
                       <a:pPr algn="ctr"/>
                       <a:r>
-                        <a:rPr sz="1200" b="1">
+                        <a:rPr sz="1100" b="1">
                           <a:solidFill>
                             <a:srgbClr val="93A1B8"/>
                           </a:solidFill>
                           <a:latin typeface="Segoe UI"/>
                         </a:rPr>
-                        <a:t>Noise-adaptive</a:t>
+                        <a:t>Noise-aware</a:t>
                       </a:r>
                     </a:p>
                   </a:txBody>
@@ -6312,7 +6335,7 @@
                     <a:p>
                       <a:pPr algn="ctr"/>
                       <a:r>
-                        <a:rPr sz="1200" b="1">
+                        <a:rPr sz="1100" b="1">
                           <a:solidFill>
                             <a:srgbClr val="93A1B8"/>
                           </a:solidFill>
@@ -6335,36 +6358,13 @@
                     <a:p>
                       <a:pPr algn="ctr"/>
                       <a:r>
-                        <a:rPr sz="1200" b="1">
+                        <a:rPr sz="1100" b="1">
                           <a:solidFill>
                             <a:srgbClr val="93A1B8"/>
                           </a:solidFill>
                           <a:latin typeface="Segoe UI"/>
                         </a:rPr>
-                        <a:t>Rider-focused</a:t>
-                      </a:r>
-                    </a:p>
-                  </a:txBody>
-                  <a:tcPr anchor="ctr">
-                    <a:solidFill>
-                      <a:srgbClr val="1B2740"/>
-                    </a:solidFill>
-                  </a:tcPr>
-                </a:tc>
-                <a:tc>
-                  <a:txBody>
-                    <a:bodyPr/>
-                    <a:lstStyle/>
-                    <a:p>
-                      <a:pPr algn="ctr"/>
-                      <a:r>
-                        <a:rPr sz="1200" b="1">
-                          <a:solidFill>
-                            <a:srgbClr val="93A1B8"/>
-                          </a:solidFill>
-                          <a:latin typeface="Segoe UI"/>
-                        </a:rPr>
-                        <a:t>Offline ASR</a:t>
+                        <a:t>Recognition in app</a:t>
                       </a:r>
                     </a:p>
                   </a:txBody>
@@ -6375,7 +6375,7 @@
                   </a:tcPr>
                 </a:tc>
               </a:tr>
-              <a:tr h="472440">
+              <a:tr h="375920">
                 <a:tc>
                   <a:txBody>
                     <a:bodyPr/>
@@ -6383,7 +6383,7 @@
                     <a:p>
                       <a:pPr algn="l"/>
                       <a:r>
-                        <a:rPr sz="1200" b="0">
+                        <a:rPr sz="1100" b="0">
                           <a:solidFill>
                             <a:srgbClr val="F5F7FA"/>
                           </a:solidFill>
@@ -6404,9 +6404,32 @@
                     <a:bodyPr/>
                     <a:lstStyle/>
                     <a:p>
+                      <a:pPr algn="l"/>
+                      <a:r>
+                        <a:rPr sz="1100" b="0">
+                          <a:solidFill>
+                            <a:srgbClr val="F5F7FA"/>
+                          </a:solidFill>
+                          <a:latin typeface="Segoe UI"/>
+                        </a:rPr>
+                        <a:t>Any phone</a:t>
+                      </a:r>
+                    </a:p>
+                  </a:txBody>
+                  <a:tcPr anchor="ctr">
+                    <a:solidFill>
+                      <a:srgbClr val="131C2E"/>
+                    </a:solidFill>
+                  </a:tcPr>
+                </a:tc>
+                <a:tc>
+                  <a:txBody>
+                    <a:bodyPr/>
+                    <a:lstStyle/>
+                    <a:p>
                       <a:pPr algn="ctr"/>
                       <a:r>
-                        <a:rPr sz="1200" b="0">
+                        <a:rPr sz="1100" b="0">
                           <a:solidFill>
                             <a:srgbClr val="F5F7FA"/>
                           </a:solidFill>
@@ -6429,7 +6452,7 @@
                     <a:p>
                       <a:pPr algn="ctr"/>
                       <a:r>
-                        <a:rPr sz="1200" b="0">
+                        <a:rPr sz="1100" b="0">
                           <a:solidFill>
                             <a:srgbClr val="F5F7FA"/>
                           </a:solidFill>
@@ -6452,7 +6475,7 @@
                     <a:p>
                       <a:pPr algn="ctr"/>
                       <a:r>
-                        <a:rPr sz="1200" b="0">
+                        <a:rPr sz="1100" b="0">
                           <a:solidFill>
                             <a:srgbClr val="F5F7FA"/>
                           </a:solidFill>
@@ -6475,7 +6498,101 @@
                     <a:p>
                       <a:pPr algn="ctr"/>
                       <a:r>
-                        <a:rPr sz="1200" b="0">
+                        <a:rPr sz="1100" b="0">
+                          <a:solidFill>
+                            <a:srgbClr val="F5F7FA"/>
+                          </a:solidFill>
+                          <a:latin typeface="Segoe UI"/>
+                        </a:rPr>
+                        <a:t>No (OS)</a:t>
+                      </a:r>
+                    </a:p>
+                  </a:txBody>
+                  <a:tcPr anchor="ctr">
+                    <a:solidFill>
+                      <a:srgbClr val="131C2E"/>
+                    </a:solidFill>
+                  </a:tcPr>
+                </a:tc>
+              </a:tr>
+              <a:tr h="375920">
+                <a:tc>
+                  <a:txBody>
+                    <a:bodyPr/>
+                    <a:lstStyle/>
+                    <a:p>
+                      <a:pPr algn="l"/>
+                      <a:r>
+                        <a:rPr sz="1100" b="0">
+                          <a:solidFill>
+                            <a:srgbClr val="F5F7FA"/>
+                          </a:solidFill>
+                          <a:latin typeface="Segoe UI"/>
+                        </a:rPr>
+                        <a:t>Spotify in-app voice</a:t>
+                      </a:r>
+                    </a:p>
+                  </a:txBody>
+                  <a:tcPr anchor="ctr">
+                    <a:solidFill>
+                      <a:srgbClr val="131C2E"/>
+                    </a:solidFill>
+                  </a:tcPr>
+                </a:tc>
+                <a:tc>
+                  <a:txBody>
+                    <a:bodyPr/>
+                    <a:lstStyle/>
+                    <a:p>
+                      <a:pPr algn="l"/>
+                      <a:r>
+                        <a:rPr sz="1100" b="0">
+                          <a:solidFill>
+                            <a:srgbClr val="F5F7FA"/>
+                          </a:solidFill>
+                          <a:latin typeface="Segoe UI"/>
+                        </a:rPr>
+                        <a:t>Any phone</a:t>
+                      </a:r>
+                    </a:p>
+                  </a:txBody>
+                  <a:tcPr anchor="ctr">
+                    <a:solidFill>
+                      <a:srgbClr val="131C2E"/>
+                    </a:solidFill>
+                  </a:tcPr>
+                </a:tc>
+                <a:tc>
+                  <a:txBody>
+                    <a:bodyPr/>
+                    <a:lstStyle/>
+                    <a:p>
+                      <a:pPr algn="ctr"/>
+                      <a:r>
+                        <a:rPr sz="1100" b="0">
+                          <a:solidFill>
+                            <a:srgbClr val="F5F7FA"/>
+                          </a:solidFill>
+                          <a:latin typeface="Segoe UI"/>
+                        </a:rPr>
+                        <a:t>Required</a:t>
+                      </a:r>
+                    </a:p>
+                  </a:txBody>
+                  <a:tcPr anchor="ctr">
+                    <a:solidFill>
+                      <a:srgbClr val="131C2E"/>
+                    </a:solidFill>
+                  </a:tcPr>
+                </a:tc>
+                <a:tc>
+                  <a:txBody>
+                    <a:bodyPr/>
+                    <a:lstStyle/>
+                    <a:p>
+                      <a:pPr algn="ctr"/>
+                      <a:r>
+                        <a:rPr sz="1100" b="0">
                           <a:solidFill>
                             <a:srgbClr val="F5F7FA"/>
                           </a:solidFill>
@@ -6498,38 +6615,13 @@
                     <a:p>
                       <a:pPr algn="ctr"/>
                       <a:r>
-                        <a:rPr sz="1200" b="0">
+                        <a:rPr sz="1100" b="0">
                           <a:solidFill>
                             <a:srgbClr val="F5F7FA"/>
                           </a:solidFill>
                           <a:latin typeface="Segoe UI"/>
                         </a:rPr>
                         <a:t>No</a:t>
-                      </a:r>
-                    </a:p>
-                  </a:txBody>
-                  <a:tcPr anchor="ctr">
-                    <a:solidFill>
-                      <a:srgbClr val="131C2E"/>
-                    </a:solidFill>
-                  </a:tcPr>
-                </a:tc>
-              </a:tr>
-              <a:tr h="472440">
-                <a:tc>
-                  <a:txBody>
-                    <a:bodyPr/>
-                    <a:lstStyle/>
-                    <a:p>
-                      <a:pPr algn="l"/>
-                      <a:r>
-                        <a:rPr sz="1200" b="0">
-                          <a:solidFill>
-                            <a:srgbClr val="F5F7FA"/>
-                          </a:solidFill>
-                          <a:latin typeface="Segoe UI"/>
-                        </a:rPr>
-                        <a:t>Spotify in-app voice</a:t>
                       </a:r>
                     </a:p>
                   </a:txBody>
@@ -6546,7 +6638,78 @@
                     <a:p>
                       <a:pPr algn="ctr"/>
                       <a:r>
-                        <a:rPr sz="1200" b="0">
+                        <a:rPr sz="1100" b="0">
+                          <a:solidFill>
+                            <a:srgbClr val="F5F7FA"/>
+                          </a:solidFill>
+                          <a:latin typeface="Segoe UI"/>
+                        </a:rPr>
+                        <a:t>No (OS)</a:t>
+                      </a:r>
+                    </a:p>
+                  </a:txBody>
+                  <a:tcPr anchor="ctr">
+                    <a:solidFill>
+                      <a:srgbClr val="131C2E"/>
+                    </a:solidFill>
+                  </a:tcPr>
+                </a:tc>
+              </a:tr>
+              <a:tr h="375920">
+                <a:tc>
+                  <a:txBody>
+                    <a:bodyPr/>
+                    <a:lstStyle/>
+                    <a:p>
+                      <a:pPr algn="l"/>
+                      <a:r>
+                        <a:rPr sz="1100" b="0">
+                          <a:solidFill>
+                            <a:srgbClr val="F5F7FA"/>
+                          </a:solidFill>
+                          <a:latin typeface="Segoe UI"/>
+                        </a:rPr>
+                        <a:t>Android Auto / car head unit</a:t>
+                      </a:r>
+                    </a:p>
+                  </a:txBody>
+                  <a:tcPr anchor="ctr">
+                    <a:solidFill>
+                      <a:srgbClr val="131C2E"/>
+                    </a:solidFill>
+                  </a:tcPr>
+                </a:tc>
+                <a:tc>
+                  <a:txBody>
+                    <a:bodyPr/>
+                    <a:lstStyle/>
+                    <a:p>
+                      <a:pPr algn="l"/>
+                      <a:r>
+                        <a:rPr sz="1100" b="0">
+                          <a:solidFill>
+                            <a:srgbClr val="F5F7FA"/>
+                          </a:solidFill>
+                          <a:latin typeface="Segoe UI"/>
+                        </a:rPr>
+                        <a:t>Head unit + screen</a:t>
+                      </a:r>
+                    </a:p>
+                  </a:txBody>
+                  <a:tcPr anchor="ctr">
+                    <a:solidFill>
+                      <a:srgbClr val="131C2E"/>
+                    </a:solidFill>
+                  </a:tcPr>
+                </a:tc>
+                <a:tc>
+                  <a:txBody>
+                    <a:bodyPr/>
+                    <a:lstStyle/>
+                    <a:p>
+                      <a:pPr algn="ctr"/>
+                      <a:r>
+                        <a:rPr sz="1100" b="0">
                           <a:solidFill>
                             <a:srgbClr val="F5F7FA"/>
                           </a:solidFill>
@@ -6569,7 +6732,7 @@
                     <a:p>
                       <a:pPr algn="ctr"/>
                       <a:r>
-                        <a:rPr sz="1200" b="0">
+                        <a:rPr sz="1100" b="0">
                           <a:solidFill>
                             <a:srgbClr val="F5F7FA"/>
                           </a:solidFill>
@@ -6592,7 +6755,7 @@
                     <a:p>
                       <a:pPr algn="ctr"/>
                       <a:r>
-                        <a:rPr sz="1200" b="0">
+                        <a:rPr sz="1100" b="0">
                           <a:solidFill>
                             <a:srgbClr val="F5F7FA"/>
                           </a:solidFill>
@@ -6615,7 +6778,101 @@
                     <a:p>
                       <a:pPr algn="ctr"/>
                       <a:r>
-                        <a:rPr sz="1200" b="0">
+                        <a:rPr sz="1100" b="0">
+                          <a:solidFill>
+                            <a:srgbClr val="F5F7FA"/>
+                          </a:solidFill>
+                          <a:latin typeface="Segoe UI"/>
+                        </a:rPr>
+                        <a:t>No (OS)</a:t>
+                      </a:r>
+                    </a:p>
+                  </a:txBody>
+                  <a:tcPr anchor="ctr">
+                    <a:solidFill>
+                      <a:srgbClr val="131C2E"/>
+                    </a:solidFill>
+                  </a:tcPr>
+                </a:tc>
+              </a:tr>
+              <a:tr h="375920">
+                <a:tc>
+                  <a:txBody>
+                    <a:bodyPr/>
+                    <a:lstStyle/>
+                    <a:p>
+                      <a:pPr algn="l"/>
+                      <a:r>
+                        <a:rPr sz="1100" b="0">
+                          <a:solidFill>
+                            <a:srgbClr val="F5F7FA"/>
+                          </a:solidFill>
+                          <a:latin typeface="Segoe UI"/>
+                        </a:rPr>
+                        <a:t>Honda Smartphone Voice Control</a:t>
+                      </a:r>
+                    </a:p>
+                  </a:txBody>
+                  <a:tcPr anchor="ctr">
+                    <a:solidFill>
+                      <a:srgbClr val="131C2E"/>
+                    </a:solidFill>
+                  </a:tcPr>
+                </a:tc>
+                <a:tc>
+                  <a:txBody>
+                    <a:bodyPr/>
+                    <a:lstStyle/>
+                    <a:p>
+                      <a:pPr algn="l"/>
+                      <a:r>
+                        <a:rPr sz="1100" b="0">
+                          <a:solidFill>
+                            <a:srgbClr val="F5F7FA"/>
+                          </a:solidFill>
+                          <a:latin typeface="Segoe UI"/>
+                        </a:rPr>
+                        <a:t>Selected Honda + headset</a:t>
+                      </a:r>
+                    </a:p>
+                  </a:txBody>
+                  <a:tcPr anchor="ctr">
+                    <a:solidFill>
+                      <a:srgbClr val="131C2E"/>
+                    </a:solidFill>
+                  </a:tcPr>
+                </a:tc>
+                <a:tc>
+                  <a:txBody>
+                    <a:bodyPr/>
+                    <a:lstStyle/>
+                    <a:p>
+                      <a:pPr algn="ctr"/>
+                      <a:r>
+                        <a:rPr sz="1100" b="0">
+                          <a:solidFill>
+                            <a:srgbClr val="F5F7FA"/>
+                          </a:solidFill>
+                          <a:latin typeface="Segoe UI"/>
+                        </a:rPr>
+                        <a:t>Required</a:t>
+                      </a:r>
+                    </a:p>
+                  </a:txBody>
+                  <a:tcPr anchor="ctr">
+                    <a:solidFill>
+                      <a:srgbClr val="131C2E"/>
+                    </a:solidFill>
+                  </a:tcPr>
+                </a:tc>
+                <a:tc>
+                  <a:txBody>
+                    <a:bodyPr/>
+                    <a:lstStyle/>
+                    <a:p>
+                      <a:pPr algn="ctr"/>
+                      <a:r>
+                        <a:rPr sz="1100" b="0">
                           <a:solidFill>
                             <a:srgbClr val="F5F7FA"/>
                           </a:solidFill>
@@ -6638,38 +6895,13 @@
                     <a:p>
                       <a:pPr algn="ctr"/>
                       <a:r>
-                        <a:rPr sz="1200" b="0">
+                        <a:rPr sz="1100" b="0">
                           <a:solidFill>
                             <a:srgbClr val="F5F7FA"/>
                           </a:solidFill>
                           <a:latin typeface="Segoe UI"/>
                         </a:rPr>
                         <a:t>No</a:t>
-                      </a:r>
-                    </a:p>
-                  </a:txBody>
-                  <a:tcPr anchor="ctr">
-                    <a:solidFill>
-                      <a:srgbClr val="131C2E"/>
-                    </a:solidFill>
-                  </a:tcPr>
-                </a:tc>
-              </a:tr>
-              <a:tr h="472440">
-                <a:tc>
-                  <a:txBody>
-                    <a:bodyPr/>
-                    <a:lstStyle/>
-                    <a:p>
-                      <a:pPr algn="l"/>
-                      <a:r>
-                        <a:rPr sz="1200" b="0">
-                          <a:solidFill>
-                            <a:srgbClr val="F5F7FA"/>
-                          </a:solidFill>
-                          <a:latin typeface="Segoe UI"/>
-                        </a:rPr>
-                        <a:t>Android Auto / car head unit</a:t>
                       </a:r>
                     </a:p>
                   </a:txBody>
@@ -6686,7 +6918,78 @@
                     <a:p>
                       <a:pPr algn="ctr"/>
                       <a:r>
-                        <a:rPr sz="1200" b="0">
+                        <a:rPr sz="1100" b="0">
+                          <a:solidFill>
+                            <a:srgbClr val="F5F7FA"/>
+                          </a:solidFill>
+                          <a:latin typeface="Segoe UI"/>
+                        </a:rPr>
+                        <a:t>No (OS)</a:t>
+                      </a:r>
+                    </a:p>
+                  </a:txBody>
+                  <a:tcPr anchor="ctr">
+                    <a:solidFill>
+                      <a:srgbClr val="131C2E"/>
+                    </a:solidFill>
+                  </a:tcPr>
+                </a:tc>
+              </a:tr>
+              <a:tr h="375920">
+                <a:tc>
+                  <a:txBody>
+                    <a:bodyPr/>
+                    <a:lstStyle/>
+                    <a:p>
+                      <a:pPr algn="l"/>
+                      <a:r>
+                        <a:rPr sz="1100" b="0">
+                          <a:solidFill>
+                            <a:srgbClr val="F5F7FA"/>
+                          </a:solidFill>
+                          <a:latin typeface="Segoe UI"/>
+                        </a:rPr>
+                        <a:t>Harley-Davidson Boom! Box</a:t>
+                      </a:r>
+                    </a:p>
+                  </a:txBody>
+                  <a:tcPr anchor="ctr">
+                    <a:solidFill>
+                      <a:srgbClr val="131C2E"/>
+                    </a:solidFill>
+                  </a:tcPr>
+                </a:tc>
+                <a:tc>
+                  <a:txBody>
+                    <a:bodyPr/>
+                    <a:lstStyle/>
+                    <a:p>
+                      <a:pPr algn="l"/>
+                      <a:r>
+                        <a:rPr sz="1100" b="0">
+                          <a:solidFill>
+                            <a:srgbClr val="F5F7FA"/>
+                          </a:solidFill>
+                          <a:latin typeface="Segoe UI"/>
+                        </a:rPr>
+                        <a:t>Touring models only</a:t>
+                      </a:r>
+                    </a:p>
+                  </a:txBody>
+                  <a:tcPr anchor="ctr">
+                    <a:solidFill>
+                      <a:srgbClr val="131C2E"/>
+                    </a:solidFill>
+                  </a:tcPr>
+                </a:tc>
+                <a:tc>
+                  <a:txBody>
+                    <a:bodyPr/>
+                    <a:lstStyle/>
+                    <a:p>
+                      <a:pPr algn="ctr"/>
+                      <a:r>
+                        <a:rPr sz="1100" b="0">
                           <a:solidFill>
                             <a:srgbClr val="F5F7FA"/>
                           </a:solidFill>
@@ -6709,7 +7012,7 @@
                     <a:p>
                       <a:pPr algn="ctr"/>
                       <a:r>
-                        <a:rPr sz="1200" b="0">
+                        <a:rPr sz="1100" b="0">
                           <a:solidFill>
                             <a:srgbClr val="F5F7FA"/>
                           </a:solidFill>
@@ -6732,7 +7035,7 @@
                     <a:p>
                       <a:pPr algn="ctr"/>
                       <a:r>
-                        <a:rPr sz="1200" b="0">
+                        <a:rPr sz="1100" b="0">
                           <a:solidFill>
                             <a:srgbClr val="F5F7FA"/>
                           </a:solidFill>
@@ -6755,13 +7058,61 @@
                     <a:p>
                       <a:pPr algn="ctr"/>
                       <a:r>
-                        <a:rPr sz="1200" b="0">
+                        <a:rPr sz="1100" b="0">
                           <a:solidFill>
                             <a:srgbClr val="F5F7FA"/>
                           </a:solidFill>
                           <a:latin typeface="Segoe UI"/>
                         </a:rPr>
-                        <a:t>Car, not bike</a:t>
+                        <a:t>No (OS)</a:t>
+                      </a:r>
+                    </a:p>
+                  </a:txBody>
+                  <a:tcPr anchor="ctr">
+                    <a:solidFill>
+                      <a:srgbClr val="131C2E"/>
+                    </a:solidFill>
+                  </a:tcPr>
+                </a:tc>
+              </a:tr>
+              <a:tr h="375920">
+                <a:tc>
+                  <a:txBody>
+                    <a:bodyPr/>
+                    <a:lstStyle/>
+                    <a:p>
+                      <a:pPr algn="l"/>
+                      <a:r>
+                        <a:rPr sz="1100" b="0">
+                          <a:solidFill>
+                            <a:srgbClr val="F5F7FA"/>
+                          </a:solidFill>
+                          <a:latin typeface="Segoe UI"/>
+                        </a:rPr>
+                        <a:t>Cardo / Sena helmet intercoms</a:t>
+                      </a:r>
+                    </a:p>
+                  </a:txBody>
+                  <a:tcPr anchor="ctr">
+                    <a:solidFill>
+                      <a:srgbClr val="131C2E"/>
+                    </a:solidFill>
+                  </a:tcPr>
+                </a:tc>
+                <a:tc>
+                  <a:txBody>
+                    <a:bodyPr/>
+                    <a:lstStyle/>
+                    <a:p>
+                      <a:pPr algn="l"/>
+                      <a:r>
+                        <a:rPr sz="1100" b="0">
+                          <a:solidFill>
+                            <a:srgbClr val="F5F7FA"/>
+                          </a:solidFill>
+                          <a:latin typeface="Segoe UI"/>
+                        </a:rPr>
+                        <a:t>Helmet intercom</a:t>
                       </a:r>
                     </a:p>
                   </a:txBody>
@@ -6778,7 +7129,30 @@
                     <a:p>
                       <a:pPr algn="ctr"/>
                       <a:r>
-                        <a:rPr sz="1200" b="0">
+                        <a:rPr sz="1100" b="0">
+                          <a:solidFill>
+                            <a:srgbClr val="F5F7FA"/>
+                          </a:solidFill>
+                          <a:latin typeface="Segoe UI"/>
+                        </a:rPr>
+                        <a:t>Required</a:t>
+                      </a:r>
+                    </a:p>
+                  </a:txBody>
+                  <a:tcPr anchor="ctr">
+                    <a:solidFill>
+                      <a:srgbClr val="131C2E"/>
+                    </a:solidFill>
+                  </a:tcPr>
+                </a:tc>
+                <a:tc>
+                  <a:txBody>
+                    <a:bodyPr/>
+                    <a:lstStyle/>
+                    <a:p>
+                      <a:pPr algn="ctr"/>
+                      <a:r>
+                        <a:rPr sz="1100" b="0">
                           <a:solidFill>
                             <a:srgbClr val="F5F7FA"/>
                           </a:solidFill>
@@ -6794,8 +7168,54 @@
                     </a:solidFill>
                   </a:tcPr>
                 </a:tc>
+                <a:tc>
+                  <a:txBody>
+                    <a:bodyPr/>
+                    <a:lstStyle/>
+                    <a:p>
+                      <a:pPr algn="ctr"/>
+                      <a:r>
+                        <a:rPr sz="1100" b="0">
+                          <a:solidFill>
+                            <a:srgbClr val="F5F7FA"/>
+                          </a:solidFill>
+                          <a:latin typeface="Segoe UI"/>
+                        </a:rPr>
+                        <a:t>No</a:t>
+                      </a:r>
+                    </a:p>
+                  </a:txBody>
+                  <a:tcPr anchor="ctr">
+                    <a:solidFill>
+                      <a:srgbClr val="131C2E"/>
+                    </a:solidFill>
+                  </a:tcPr>
+                </a:tc>
+                <a:tc>
+                  <a:txBody>
+                    <a:bodyPr/>
+                    <a:lstStyle/>
+                    <a:p>
+                      <a:pPr algn="ctr"/>
+                      <a:r>
+                        <a:rPr sz="1100" b="0">
+                          <a:solidFill>
+                            <a:srgbClr val="F5F7FA"/>
+                          </a:solidFill>
+                          <a:latin typeface="Segoe UI"/>
+                        </a:rPr>
+                        <a:t>No (OS)</a:t>
+                      </a:r>
+                    </a:p>
+                  </a:txBody>
+                  <a:tcPr anchor="ctr">
+                    <a:solidFill>
+                      <a:srgbClr val="131C2E"/>
+                    </a:solidFill>
+                  </a:tcPr>
+                </a:tc>
               </a:tr>
-              <a:tr h="472440">
+              <a:tr h="375920">
                 <a:tc>
                   <a:txBody>
                     <a:bodyPr/>
@@ -6803,7 +7223,7 @@
                     <a:p>
                       <a:pPr algn="l"/>
                       <a:r>
-                        <a:rPr sz="1200" b="0">
+                        <a:rPr sz="1100" b="0">
                           <a:solidFill>
                             <a:srgbClr val="F5F7FA"/>
                           </a:solidFill>
@@ -6824,9 +7244,32 @@
                     <a:bodyPr/>
                     <a:lstStyle/>
                     <a:p>
+                      <a:pPr algn="l"/>
+                      <a:r>
+                        <a:rPr sz="1100" b="0">
+                          <a:solidFill>
+                            <a:srgbClr val="F5F7FA"/>
+                          </a:solidFill>
+                          <a:latin typeface="Segoe UI"/>
+                        </a:rPr>
+                        <a:t>Any BT headset</a:t>
+                      </a:r>
+                    </a:p>
+                  </a:txBody>
+                  <a:tcPr anchor="ctr">
+                    <a:solidFill>
+                      <a:srgbClr val="131C2E"/>
+                    </a:solidFill>
+                  </a:tcPr>
+                </a:tc>
+                <a:tc>
+                  <a:txBody>
+                    <a:bodyPr/>
+                    <a:lstStyle/>
+                    <a:p>
                       <a:pPr algn="ctr"/>
                       <a:r>
-                        <a:rPr sz="1200" b="0">
+                        <a:rPr sz="1100" b="0">
                           <a:solidFill>
                             <a:srgbClr val="F5F7FA"/>
                           </a:solidFill>
@@ -6849,7 +7292,7 @@
                     <a:p>
                       <a:pPr algn="ctr"/>
                       <a:r>
-                        <a:rPr sz="1200" b="0">
+                        <a:rPr sz="1100" b="0">
                           <a:solidFill>
                             <a:srgbClr val="F5F7FA"/>
                           </a:solidFill>
@@ -6872,7 +7315,7 @@
                     <a:p>
                       <a:pPr algn="ctr"/>
                       <a:r>
-                        <a:rPr sz="1200" b="0">
+                        <a:rPr sz="1100" b="0">
                           <a:solidFill>
                             <a:srgbClr val="F5F7FA"/>
                           </a:solidFill>
@@ -6895,30 +7338,7 @@
                     <a:p>
                       <a:pPr algn="ctr"/>
                       <a:r>
-                        <a:rPr sz="1200" b="0">
-                          <a:solidFill>
-                            <a:srgbClr val="F5F7FA"/>
-                          </a:solidFill>
-                          <a:latin typeface="Segoe UI"/>
-                        </a:rPr>
-                        <a:t>Partial</a:t>
-                      </a:r>
-                    </a:p>
-                  </a:txBody>
-                  <a:tcPr anchor="ctr">
-                    <a:solidFill>
-                      <a:srgbClr val="131C2E"/>
-                    </a:solidFill>
-                  </a:tcPr>
-                </a:tc>
-                <a:tc>
-                  <a:txBody>
-                    <a:bodyPr/>
-                    <a:lstStyle/>
-                    <a:p>
-                      <a:pPr algn="ctr"/>
-                      <a:r>
-                        <a:rPr sz="1200" b="0">
+                        <a:rPr sz="1100" b="0">
                           <a:solidFill>
                             <a:srgbClr val="F5F7FA"/>
                           </a:solidFill>
@@ -6935,7 +7355,7 @@
                   </a:tcPr>
                 </a:tc>
               </a:tr>
-              <a:tr h="472440">
+              <a:tr h="375920">
                 <a:tc>
                   <a:txBody>
                     <a:bodyPr/>
@@ -6943,7 +7363,7 @@
                     <a:p>
                       <a:pPr algn="l"/>
                       <a:r>
-                        <a:rPr sz="1200" b="1">
+                        <a:rPr sz="1100" b="1">
                           <a:solidFill>
                             <a:srgbClr val="1DB954"/>
                           </a:solidFill>
@@ -6964,9 +7384,32 @@
                     <a:bodyPr/>
                     <a:lstStyle/>
                     <a:p>
+                      <a:pPr algn="l"/>
+                      <a:r>
+                        <a:rPr sz="1100" b="1">
+                          <a:solidFill>
+                            <a:srgbClr val="1DB954"/>
+                          </a:solidFill>
+                          <a:latin typeface="Segoe UI"/>
+                        </a:rPr>
+                        <a:t>Any phone + any headset</a:t>
+                      </a:r>
+                    </a:p>
+                  </a:txBody>
+                  <a:tcPr anchor="ctr">
+                    <a:solidFill>
+                      <a:srgbClr val="102A1A"/>
+                    </a:solidFill>
+                  </a:tcPr>
+                </a:tc>
+                <a:tc>
+                  <a:txBody>
+                    <a:bodyPr/>
+                    <a:lstStyle/>
+                    <a:p>
                       <a:pPr algn="ctr"/>
                       <a:r>
-                        <a:rPr sz="1200" b="1">
+                        <a:rPr sz="1100" b="1">
                           <a:solidFill>
                             <a:srgbClr val="1DB954"/>
                           </a:solidFill>
@@ -6989,7 +7432,7 @@
                     <a:p>
                       <a:pPr algn="ctr"/>
                       <a:r>
-                        <a:rPr sz="1200" b="1">
+                        <a:rPr sz="1100" b="1">
                           <a:solidFill>
                             <a:srgbClr val="1DB954"/>
                           </a:solidFill>
@@ -7012,7 +7455,7 @@
                     <a:p>
                       <a:pPr algn="ctr"/>
                       <a:r>
-                        <a:rPr sz="1200" b="1">
+                        <a:rPr sz="1100" b="1">
                           <a:solidFill>
                             <a:srgbClr val="1DB954"/>
                           </a:solidFill>
@@ -7035,36 +7478,13 @@
                     <a:p>
                       <a:pPr algn="ctr"/>
                       <a:r>
-                        <a:rPr sz="1200" b="1">
+                        <a:rPr sz="1100" b="1">
                           <a:solidFill>
                             <a:srgbClr val="1DB954"/>
                           </a:solidFill>
                           <a:latin typeface="Segoe UI"/>
                         </a:rPr>
-                        <a:t>Yes</a:t>
-                      </a:r>
-                    </a:p>
-                  </a:txBody>
-                  <a:tcPr anchor="ctr">
-                    <a:solidFill>
-                      <a:srgbClr val="102A1A"/>
-                    </a:solidFill>
-                  </a:tcPr>
-                </a:tc>
-                <a:tc>
-                  <a:txBody>
-                    <a:bodyPr/>
-                    <a:lstStyle/>
-                    <a:p>
-                      <a:pPr algn="ctr"/>
-                      <a:r>
-                        <a:rPr sz="1200" b="1">
-                          <a:solidFill>
-                            <a:srgbClr val="1DB954"/>
-                          </a:solidFill>
-                          <a:latin typeface="Segoe UI"/>
-                        </a:rPr>
-                        <a:t>Yes</a:t>
+                        <a:t>Yes (on-device)</a:t>
                       </a:r>
                     </a:p>
                   </a:txBody>
@@ -7087,8 +7507,8 @@
         </p:nvSpPr>
         <p:spPr>
           <a:xfrm>
-            <a:off x="548640" y="4526280"/>
-            <a:ext cx="11064240" cy="731520"/>
+            <a:off x="548640" y="4773168"/>
+            <a:ext cx="11064240" cy="548640"/>
           </a:xfrm>
           <a:prstGeom prst="rect">
             <a:avLst/>
@@ -7103,17 +7523,17 @@
           <a:p>
             <a:pPr algn="l">
               <a:lnSpc>
-                <a:spcPct val="125000"/>
+                <a:spcPct val="120000"/>
               </a:lnSpc>
             </a:pPr>
             <a:r>
-              <a:rPr sz="1300" b="0">
-                <a:solidFill>
-                  <a:srgbClr val="F59E0B"/>
-                </a:solidFill>
-                <a:latin typeface="Segoe UI"/>
-              </a:rPr>
-              <a:t>Not available together anywhere today:  hands-free with no wake word, noise-aware behaviour, playlist-number navigation, and confidence-gated recovery from noisy transcripts.</a:t>
+              <a:rPr sz="1150" b="0">
+                <a:solidFill>
+                  <a:srgbClr val="93A1B8"/>
+                </a:solidFill>
+                <a:latin typeface="Segoe UI"/>
+              </a:rPr>
+              <a:t>The motorbike manufacturers do have voice systems — Honda's Smartphone Voice Control, Harley's Boom! Box — but they need a specific motorcycle, and they hand the actual recognition to your phone's assistant.</a:t>
             </a:r>
           </a:p>
         </p:txBody>
@@ -7126,8 +7546,8 @@
         </p:nvSpPr>
         <p:spPr>
           <a:xfrm>
-            <a:off x="548640" y="5257800"/>
-            <a:ext cx="11064240" cy="457200"/>
+            <a:off x="548640" y="5376672"/>
+            <a:ext cx="11064240" cy="548640"/>
           </a:xfrm>
           <a:prstGeom prst="rect">
             <a:avLst/>
@@ -7140,15 +7560,19 @@
           </a:bodyPr>
           <a:lstStyle/>
           <a:p>
-            <a:pPr algn="l"/>
-            <a:r>
-              <a:rPr sz="1200" b="0">
-                <a:solidFill>
-                  <a:srgbClr val="93A1B8"/>
-                </a:solidFill>
-                <a:latin typeface="Segoe UI"/>
-              </a:rPr>
-              <a:t>Also note: on-device recognition keeps working with no signal — relevant on a bike with no data.</a:t>
+            <a:pPr algn="l">
+              <a:lnSpc>
+                <a:spcPct val="120000"/>
+              </a:lnSpc>
+            </a:pPr>
+            <a:r>
+              <a:rPr sz="1250" b="1">
+                <a:solidFill>
+                  <a:srgbClr val="F59E0B"/>
+                </a:solidFill>
+                <a:latin typeface="Segoe UI"/>
+              </a:rPr>
+              <a:t>The gap:  no wake word + noise-aware + song-number navigation + recognition that runs inside the app, on any phone and any bike, with no extra hardware.</a:t>
             </a:r>
           </a:p>
         </p:txBody>

--- a/presentation/VoiceRiders-4min.pptx
+++ b/presentation/VoiceRiders-4min.pptx
@@ -8132,47 +8132,30 @@
           </a:p>
         </p:txBody>
       </p:sp>
-      <p:sp>
-        <p:nvSpPr>
-          <p:cNvPr id="12" name="TextBox 11"/>
-          <p:cNvSpPr txBox="1"/>
-          <p:nvPr/>
-        </p:nvSpPr>
-        <p:spPr>
-          <a:xfrm>
-            <a:off x="5943600" y="2834640"/>
-            <a:ext cx="1600200" cy="914400"/>
+      <p:pic>
+        <p:nvPicPr>
+          <p:cNvPr id="12" name="Picture 11" descr="app-1.png"/>
+          <p:cNvPicPr>
+            <a:picLocks noChangeAspect="1"/>
+          </p:cNvPicPr>
+          <p:nvPr/>
+        </p:nvPicPr>
+        <p:blipFill>
+          <a:blip r:embed="rId2"/>
+          <a:stretch>
+            <a:fillRect/>
+          </a:stretch>
+        </p:blipFill>
+        <p:spPr>
+          <a:xfrm>
+            <a:off x="5861303" y="1426464"/>
+            <a:ext cx="1764792" cy="3921760"/>
           </a:xfrm>
           <a:prstGeom prst="rect">
             <a:avLst/>
           </a:prstGeom>
-          <a:noFill/>
-        </p:spPr>
-        <p:txBody>
-          <a:bodyPr wrap="square" anchor="t">
-            <a:spAutoFit/>
-          </a:bodyPr>
-          <a:lstStyle/>
-          <a:p>
-            <a:pPr algn="ctr">
-              <a:lnSpc>
-                <a:spcPct val="120000"/>
-              </a:lnSpc>
-            </a:pPr>
-            <a:r>
-              <a:rPr sz="1100" b="0">
-                <a:solidFill>
-                  <a:srgbClr val="93A1B8"/>
-                </a:solidFill>
-                <a:latin typeface="Segoe UI"/>
-              </a:rPr>
-              <a:t>put
-app-1.png
-here</a:t>
-            </a:r>
-          </a:p>
-        </p:txBody>
-      </p:sp>
+        </p:spPr>
+      </p:pic>
       <p:sp>
         <p:nvSpPr>
           <p:cNvPr id="13" name="TextBox 12"/>
@@ -8256,47 +8239,30 @@
           </a:p>
         </p:txBody>
       </p:sp>
-      <p:sp>
-        <p:nvSpPr>
-          <p:cNvPr id="15" name="TextBox 14"/>
-          <p:cNvSpPr txBox="1"/>
-          <p:nvPr/>
-        </p:nvSpPr>
-        <p:spPr>
-          <a:xfrm>
-            <a:off x="7955280" y="2834640"/>
-            <a:ext cx="1600200" cy="914400"/>
+      <p:pic>
+        <p:nvPicPr>
+          <p:cNvPr id="15" name="Picture 14" descr="app-2.png"/>
+          <p:cNvPicPr>
+            <a:picLocks noChangeAspect="1"/>
+          </p:cNvPicPr>
+          <p:nvPr/>
+        </p:nvPicPr>
+        <p:blipFill>
+          <a:blip r:embed="rId3"/>
+          <a:stretch>
+            <a:fillRect/>
+          </a:stretch>
+        </p:blipFill>
+        <p:spPr>
+          <a:xfrm>
+            <a:off x="7872984" y="1426464"/>
+            <a:ext cx="1764792" cy="3921760"/>
           </a:xfrm>
           <a:prstGeom prst="rect">
             <a:avLst/>
           </a:prstGeom>
-          <a:noFill/>
-        </p:spPr>
-        <p:txBody>
-          <a:bodyPr wrap="square" anchor="t">
-            <a:spAutoFit/>
-          </a:bodyPr>
-          <a:lstStyle/>
-          <a:p>
-            <a:pPr algn="ctr">
-              <a:lnSpc>
-                <a:spcPct val="120000"/>
-              </a:lnSpc>
-            </a:pPr>
-            <a:r>
-              <a:rPr sz="1100" b="0">
-                <a:solidFill>
-                  <a:srgbClr val="93A1B8"/>
-                </a:solidFill>
-                <a:latin typeface="Segoe UI"/>
-              </a:rPr>
-              <a:t>put
-app-2.png
-here</a:t>
-            </a:r>
-          </a:p>
-        </p:txBody>
-      </p:sp>
+        </p:spPr>
+      </p:pic>
       <p:sp>
         <p:nvSpPr>
           <p:cNvPr id="16" name="TextBox 15"/>
@@ -8380,47 +8346,30 @@
           </a:p>
         </p:txBody>
       </p:sp>
-      <p:sp>
-        <p:nvSpPr>
-          <p:cNvPr id="18" name="TextBox 17"/>
-          <p:cNvSpPr txBox="1"/>
-          <p:nvPr/>
-        </p:nvSpPr>
-        <p:spPr>
-          <a:xfrm>
-            <a:off x="9966960" y="2834640"/>
-            <a:ext cx="1600200" cy="914400"/>
+      <p:pic>
+        <p:nvPicPr>
+          <p:cNvPr id="18" name="Picture 17" descr="app-3.png"/>
+          <p:cNvPicPr>
+            <a:picLocks noChangeAspect="1"/>
+          </p:cNvPicPr>
+          <p:nvPr/>
+        </p:nvPicPr>
+        <p:blipFill>
+          <a:blip r:embed="rId4"/>
+          <a:stretch>
+            <a:fillRect/>
+          </a:stretch>
+        </p:blipFill>
+        <p:spPr>
+          <a:xfrm>
+            <a:off x="9884664" y="1426464"/>
+            <a:ext cx="1764792" cy="3921760"/>
           </a:xfrm>
           <a:prstGeom prst="rect">
             <a:avLst/>
           </a:prstGeom>
-          <a:noFill/>
-        </p:spPr>
-        <p:txBody>
-          <a:bodyPr wrap="square" anchor="t">
-            <a:spAutoFit/>
-          </a:bodyPr>
-          <a:lstStyle/>
-          <a:p>
-            <a:pPr algn="ctr">
-              <a:lnSpc>
-                <a:spcPct val="120000"/>
-              </a:lnSpc>
-            </a:pPr>
-            <a:r>
-              <a:rPr sz="1100" b="0">
-                <a:solidFill>
-                  <a:srgbClr val="93A1B8"/>
-                </a:solidFill>
-                <a:latin typeface="Segoe UI"/>
-              </a:rPr>
-              <a:t>put
-app-3.png
-here</a:t>
-            </a:r>
-          </a:p>
-        </p:txBody>
-      </p:sp>
+        </p:spPr>
+      </p:pic>
       <p:sp>
         <p:nvSpPr>
           <p:cNvPr id="19" name="TextBox 18"/>

--- a/presentation/VoiceRiders-4min.pptx
+++ b/presentation/VoiceRiders-4min.pptx
@@ -6228,12 +6228,12 @@
                 <a:tableStyleId>{5C22544A-7EE6-4342-B048-85BDC9FD1C3A}</a:tableStyleId>
               </a:tblPr>
               <a:tblGrid>
-                <a:gridCol w="2743200"/>
+                <a:gridCol w="2651760"/>
                 <a:gridCol w="2286000"/>
-                <a:gridCol w="1188720"/>
+                <a:gridCol w="1097280"/>
                 <a:gridCol w="1280160"/>
-                <a:gridCol w="1371600"/>
-                <a:gridCol w="2194560"/>
+                <a:gridCol w="1463040"/>
+                <a:gridCol w="2286000"/>
               </a:tblGrid>
               <a:tr h="375920">
                 <a:tc>
@@ -6341,7 +6341,7 @@
                           </a:solidFill>
                           <a:latin typeface="Segoe UI"/>
                         </a:rPr>
-                        <a:t>Song by number</a:t>
+                        <a:t>Song by name</a:t>
                       </a:r>
                     </a:p>
                   </a:txBody>
@@ -6481,7 +6481,7 @@
                           </a:solidFill>
                           <a:latin typeface="Segoe UI"/>
                         </a:rPr>
-                        <a:t>No</a:t>
+                        <a:t>Yes</a:t>
                       </a:r>
                     </a:p>
                   </a:txBody>
@@ -6621,7 +6621,7 @@
                           </a:solidFill>
                           <a:latin typeface="Segoe UI"/>
                         </a:rPr>
-                        <a:t>No</a:t>
+                        <a:t>Yes</a:t>
                       </a:r>
                     </a:p>
                   </a:txBody>
@@ -6761,7 +6761,7 @@
                           </a:solidFill>
                           <a:latin typeface="Segoe UI"/>
                         </a:rPr>
-                        <a:t>No</a:t>
+                        <a:t>Yes</a:t>
                       </a:r>
                     </a:p>
                   </a:txBody>
@@ -6901,7 +6901,7 @@
                           </a:solidFill>
                           <a:latin typeface="Segoe UI"/>
                         </a:rPr>
-                        <a:t>No</a:t>
+                        <a:t>Yes</a:t>
                       </a:r>
                     </a:p>
                   </a:txBody>
@@ -7041,7 +7041,7 @@
                           </a:solidFill>
                           <a:latin typeface="Segoe UI"/>
                         </a:rPr>
-                        <a:t>No</a:t>
+                        <a:t>Yes</a:t>
                       </a:r>
                     </a:p>
                   </a:txBody>
@@ -7572,7 +7572,7 @@
                 </a:solidFill>
                 <a:latin typeface="Segoe UI"/>
               </a:rPr>
-              <a:t>The gap:  no wake word + noise-aware + song-number navigation + recognition that runs inside the app, on any phone and any bike, with no extra hardware.</a:t>
+              <a:t>The gap:  no wake word + noise-aware + recognition that runs inside the app, on any phone and any bike, with no extra hardware.</a:t>
             </a:r>
           </a:p>
         </p:txBody>
@@ -7945,7 +7945,7 @@
                 </a:solidFill>
                 <a:latin typeface="Segoe UI"/>
               </a:rPr>
-              <a:t>•  Numbered playlist map — "play song number 7" resolves to a track</a:t>
+              <a:t>•  Any song by name: "play believer" plays the most popular match; "believer by imagine dragons" pins the artist</a:t>
             </a:r>
           </a:p>
           <a:p>
